--- a/lecons/USA/Economic Geography/35_USA_ECO_PW04_Calculating_and_Illustrating_Transport_Costs.pptx
+++ b/lecons/USA/Economic Geography/35_USA_ECO_PW04_Calculating_and_Illustrating_Transport_Costs.pptx
@@ -13558,7 +13558,7 @@
               <a:buNone/>
             </a:pPr>
             <a:r>
-              <a:rPr lang="en-US" sz="4000" b="1" dirty="0">
+              <a:rPr lang="en-US" sz="3200" b="1" dirty="0">
                 <a:solidFill>
                   <a:srgbClr val="111111"/>
                 </a:solidFill>
@@ -13568,7 +13568,7 @@
               </a:rPr>
               <a:t>Topic: Transport Activities and Characteristics</a:t>
             </a:r>
-            <a:endParaRPr lang="en-US" sz="4000" dirty="0"/>
+            <a:endParaRPr lang="en-US" sz="3200" dirty="0"/>
           </a:p>
           <a:p>
             <a:pPr algn="l" indent="0" marL="0">
@@ -13578,7 +13578,7 @@
               <a:buNone/>
             </a:pPr>
             <a:r>
-              <a:rPr lang="en-US" sz="4000" b="1" dirty="0">
+              <a:rPr lang="en-US" sz="3200" b="1" dirty="0">
                 <a:solidFill>
                   <a:srgbClr val="111111"/>
                 </a:solidFill>
@@ -13588,7 +13588,7 @@
               </a:rPr>
               <a:t>Sub-topic: Transport Costs Structures</a:t>
             </a:r>
-            <a:endParaRPr lang="en-US" sz="4000" dirty="0"/>
+            <a:endParaRPr lang="en-US" sz="3200" dirty="0"/>
           </a:p>
           <a:p>
             <a:pPr algn="l" indent="0" marL="0">
@@ -13598,7 +13598,7 @@
               <a:buNone/>
             </a:pPr>
             <a:r>
-              <a:rPr lang="en-US" sz="4000" b="1" dirty="0">
+              <a:rPr lang="en-US" sz="3200" b="1" dirty="0">
                 <a:solidFill>
                   <a:srgbClr val="990011"/>
                 </a:solidFill>
@@ -13608,7 +13608,7 @@
               </a:rPr>
               <a:t>Practical Work 4: Calculating and Illustrating Transport Costs</a:t>
             </a:r>
-            <a:endParaRPr lang="en-US" sz="4000" dirty="0"/>
+            <a:endParaRPr lang="en-US" sz="3200" dirty="0"/>
           </a:p>
         </p:txBody>
       </p:sp>
